--- a/10/ppt/10-2_AI와_핵심_API_연결하기_v1.pptx
+++ b/10/ppt/10-2_AI와_핵심_API_연결하기_v1.pptx
@@ -5472,7 +5472,7 @@
                 <a:ea typeface="IBM Plex Sans KR" pitchFamily="34" charset="-122"/>
                 <a:cs typeface="IBM Plex Sans KR" pitchFamily="34" charset="-120"/>
               </a:rPr>
-              <a:t>학생마다 주소와 데이터가 다르다. 옆 사람과 같을 필요가 없다.</a:t>
+              <a:t>사람마다 주소와 데이터가 다르다. 옆 사람과 같을 필요가 없다.</a:t>
             </a:r>
             <a:endParaRPr lang="en-US" sz="1500" dirty="0"/>
           </a:p>
